--- a/presentations/08-asm-capstone/08-asm-capstone-lecture.pptx
+++ b/presentations/08-asm-capstone/08-asm-capstone-lecture.pptx
@@ -137,7 +137,7 @@
   <p:extLst>
     <p:ext uri="{521415D9-36F7-43E2-AB2F-B90AF26B5E84}">
       <p14:sectionLst xmlns:p14="http://schemas.microsoft.com/office/powerpoint/2010/main">
-        <p14:section name="Opening" id="{a31f69d3-18c1-a3e8-8edc-d72dee714929}">
+        <p14:section name="Opening" id="{a2edccf0-6a72-a9b9-1f4e-0ee474c3fae5}">
           <p14:sldIdLst>
             <p14:sldId id="256"/>
             <p14:sldId id="257"/>
@@ -151,7 +151,7 @@
             <p14:sldId id="265"/>
           </p14:sldIdLst>
         </p14:section>
-        <p14:section name="Extending your own game" id="{46eb14fa-bd30-80b9-caf5-886c704a6258}">
+        <p14:section name="Extending your own game" id="{0dc64834-6353-9a20-8aaa-f6c085bafdb1}">
           <p14:sldIdLst>
             <p14:sldId id="266"/>
             <p14:sldId id="267"/>
@@ -160,7 +160,7 @@
             <p14:sldId id="270"/>
           </p14:sldIdLst>
         </p14:section>
-        <p14:section name="Sound and edges" id="{77ded03d-fd3a-226f-e2f2-f2833d068f07}">
+        <p14:section name="Sound and edges" id="{1bba4168-ef17-9a09-7564-3004e8db7c8a}">
           <p14:sldIdLst>
             <p14:sldId id="271"/>
             <p14:sldId id="272"/>
@@ -169,7 +169,7 @@
             <p14:sldId id="275"/>
           </p14:sldIdLst>
         </p14:section>
-        <p14:section name="Building a cartridge" id="{bb1e924b-1948-cfbc-069d-20cea37c9905}">
+        <p14:section name="Building a cartridge" id="{e0a95edc-0b36-4c90-57b5-602561184026}">
           <p14:sldIdLst>
             <p14:sldId id="276"/>
             <p14:sldId id="277"/>
@@ -178,7 +178,7 @@
             <p14:sldId id="280"/>
           </p14:sldIdLst>
         </p14:section>
-        <p14:section name="When it goes wrong" id="{b441eb4d-c784-f76e-2f36-0d02ba874024}">
+        <p14:section name="When it goes wrong" id="{f4175635-30f9-fddd-7907-6dad7844ae6f}">
           <p14:sldIdLst>
             <p14:sldId id="281"/>
             <p14:sldId id="282"/>
@@ -187,7 +187,7 @@
             <p14:sldId id="285"/>
           </p14:sldIdLst>
         </p14:section>
-        <p14:section name="Closing" id="{9f120343-16bb-b8f3-8156-ec0914588462}">
+        <p14:section name="Closing" id="{61ee0bb8-e2b9-31f7-4093-bf6cc5b0946e}">
           <p14:sldIdLst>
             <p14:sldId id="286"/>
           </p14:sldIdLst>
